--- a/parts/architectural-styles/hexagonal/assets/AngularSectorDrawing.pptx
+++ b/parts/architectural-styles/hexagonal/assets/AngularSectorDrawing.pptx
@@ -108,6 +108,11 @@
       </a:defRPr>
     </a:lvl9pPr>
   </p:defaultTextStyle>
+  <p:extLst>
+    <p:ext uri="{EFAFB233-063F-42B5-8137-9DF3F51BA10A}">
+      <p15:sldGuideLst xmlns:p15="http://schemas.microsoft.com/office/powerpoint/2012/main"/>
+    </p:ext>
+  </p:extLst>
 </p:presentation>
 </file>
 
@@ -193,7 +198,7 @@
           <a:p>
             <a:fld id="{FF536B6B-04D5-4E40-9017-909FA96B3CBB}" type="datetimeFigureOut">
               <a:rPr lang="da-DK" smtClean="0"/>
-              <a:t>05-05-2026</a:t>
+              <a:t>11-05-2026</a:t>
             </a:fld>
             <a:endParaRPr lang="da-DK"/>
           </a:p>
@@ -676,7 +681,7 @@
           <a:p>
             <a:fld id="{551AEFB1-0C9C-4FDD-84D9-8A1545EBF6F6}" type="datetimeFigureOut">
               <a:rPr lang="da-DK" smtClean="0"/>
-              <a:t>05-05-2026</a:t>
+              <a:t>11-05-2026</a:t>
             </a:fld>
             <a:endParaRPr lang="da-DK"/>
           </a:p>
@@ -846,7 +851,7 @@
           <a:p>
             <a:fld id="{551AEFB1-0C9C-4FDD-84D9-8A1545EBF6F6}" type="datetimeFigureOut">
               <a:rPr lang="da-DK" smtClean="0"/>
-              <a:t>05-05-2026</a:t>
+              <a:t>11-05-2026</a:t>
             </a:fld>
             <a:endParaRPr lang="da-DK"/>
           </a:p>
@@ -1026,7 +1031,7 @@
           <a:p>
             <a:fld id="{551AEFB1-0C9C-4FDD-84D9-8A1545EBF6F6}" type="datetimeFigureOut">
               <a:rPr lang="da-DK" smtClean="0"/>
-              <a:t>05-05-2026</a:t>
+              <a:t>11-05-2026</a:t>
             </a:fld>
             <a:endParaRPr lang="da-DK"/>
           </a:p>
@@ -1196,7 +1201,7 @@
           <a:p>
             <a:fld id="{551AEFB1-0C9C-4FDD-84D9-8A1545EBF6F6}" type="datetimeFigureOut">
               <a:rPr lang="da-DK" smtClean="0"/>
-              <a:t>05-05-2026</a:t>
+              <a:t>11-05-2026</a:t>
             </a:fld>
             <a:endParaRPr lang="da-DK"/>
           </a:p>
@@ -1440,7 +1445,7 @@
           <a:p>
             <a:fld id="{551AEFB1-0C9C-4FDD-84D9-8A1545EBF6F6}" type="datetimeFigureOut">
               <a:rPr lang="da-DK" smtClean="0"/>
-              <a:t>05-05-2026</a:t>
+              <a:t>11-05-2026</a:t>
             </a:fld>
             <a:endParaRPr lang="da-DK"/>
           </a:p>
@@ -1672,7 +1677,7 @@
           <a:p>
             <a:fld id="{551AEFB1-0C9C-4FDD-84D9-8A1545EBF6F6}" type="datetimeFigureOut">
               <a:rPr lang="da-DK" smtClean="0"/>
-              <a:t>05-05-2026</a:t>
+              <a:t>11-05-2026</a:t>
             </a:fld>
             <a:endParaRPr lang="da-DK"/>
           </a:p>
@@ -2039,7 +2044,7 @@
           <a:p>
             <a:fld id="{551AEFB1-0C9C-4FDD-84D9-8A1545EBF6F6}" type="datetimeFigureOut">
               <a:rPr lang="da-DK" smtClean="0"/>
-              <a:t>05-05-2026</a:t>
+              <a:t>11-05-2026</a:t>
             </a:fld>
             <a:endParaRPr lang="da-DK"/>
           </a:p>
@@ -2157,7 +2162,7 @@
           <a:p>
             <a:fld id="{551AEFB1-0C9C-4FDD-84D9-8A1545EBF6F6}" type="datetimeFigureOut">
               <a:rPr lang="da-DK" smtClean="0"/>
-              <a:t>05-05-2026</a:t>
+              <a:t>11-05-2026</a:t>
             </a:fld>
             <a:endParaRPr lang="da-DK"/>
           </a:p>
@@ -2252,7 +2257,7 @@
           <a:p>
             <a:fld id="{551AEFB1-0C9C-4FDD-84D9-8A1545EBF6F6}" type="datetimeFigureOut">
               <a:rPr lang="da-DK" smtClean="0"/>
-              <a:t>05-05-2026</a:t>
+              <a:t>11-05-2026</a:t>
             </a:fld>
             <a:endParaRPr lang="da-DK"/>
           </a:p>
@@ -2529,7 +2534,7 @@
           <a:p>
             <a:fld id="{551AEFB1-0C9C-4FDD-84D9-8A1545EBF6F6}" type="datetimeFigureOut">
               <a:rPr lang="da-DK" smtClean="0"/>
-              <a:t>05-05-2026</a:t>
+              <a:t>11-05-2026</a:t>
             </a:fld>
             <a:endParaRPr lang="da-DK"/>
           </a:p>
@@ -2786,7 +2791,7 @@
           <a:p>
             <a:fld id="{551AEFB1-0C9C-4FDD-84D9-8A1545EBF6F6}" type="datetimeFigureOut">
               <a:rPr lang="da-DK" smtClean="0"/>
-              <a:t>05-05-2026</a:t>
+              <a:t>11-05-2026</a:t>
             </a:fld>
             <a:endParaRPr lang="da-DK"/>
           </a:p>
@@ -2999,7 +3004,7 @@
           <a:p>
             <a:fld id="{551AEFB1-0C9C-4FDD-84D9-8A1545EBF6F6}" type="datetimeFigureOut">
               <a:rPr lang="da-DK" smtClean="0"/>
-              <a:t>05-05-2026</a:t>
+              <a:t>11-05-2026</a:t>
             </a:fld>
             <a:endParaRPr lang="da-DK"/>
           </a:p>
@@ -3811,8 +3816,8 @@
           </a:fontRef>
         </p:style>
       </p:cxnSp>
-      <mc:AlternateContent xmlns:mc="http://schemas.openxmlformats.org/markup-compatibility/2006">
-        <mc:Choice xmlns:a14="http://schemas.microsoft.com/office/drawing/2010/main" Requires="a14">
+      <mc:AlternateContent xmlns:mc="http://schemas.openxmlformats.org/markup-compatibility/2006" xmlns:a14="http://schemas.microsoft.com/office/drawing/2010/main">
+        <mc:Choice Requires="a14">
           <p:sp>
             <p:nvSpPr>
               <p:cNvPr id="44" name="TextBox 43">
@@ -3862,7 +3867,7 @@
             </p:txBody>
           </p:sp>
         </mc:Choice>
-        <mc:Fallback>
+        <mc:Fallback xmlns="">
           <p:sp>
             <p:nvSpPr>
               <p:cNvPr id="44" name="TextBox 43">
@@ -4978,8 +4983,8 @@
           </a:prstGeom>
         </p:spPr>
       </p:pic>
-      <mc:AlternateContent xmlns:mc="http://schemas.openxmlformats.org/markup-compatibility/2006">
-        <mc:Choice xmlns:a14="http://schemas.microsoft.com/office/drawing/2010/main" Requires="a14">
+      <mc:AlternateContent xmlns:mc="http://schemas.openxmlformats.org/markup-compatibility/2006" xmlns:a14="http://schemas.microsoft.com/office/drawing/2010/main">
+        <mc:Choice Requires="a14">
           <p:sp>
             <p:nvSpPr>
               <p:cNvPr id="58" name="TextBox 57">
@@ -5029,7 +5034,7 @@
             </p:txBody>
           </p:sp>
         </mc:Choice>
-        <mc:Fallback>
+        <mc:Fallback xmlns="">
           <p:sp>
             <p:nvSpPr>
               <p:cNvPr id="58" name="TextBox 57">
@@ -5445,8 +5450,8 @@
           </a:prstGeom>
         </p:spPr>
       </p:pic>
-      <mc:AlternateContent xmlns:mc="http://schemas.openxmlformats.org/markup-compatibility/2006">
-        <mc:Choice xmlns:a14="http://schemas.microsoft.com/office/drawing/2010/main" Requires="a14">
+      <mc:AlternateContent xmlns:mc="http://schemas.openxmlformats.org/markup-compatibility/2006" xmlns:a14="http://schemas.microsoft.com/office/drawing/2010/main">
+        <mc:Choice Requires="a14">
           <p:sp>
             <p:nvSpPr>
               <p:cNvPr id="73" name="TextBox 72">
@@ -5496,7 +5501,7 @@
             </p:txBody>
           </p:sp>
         </mc:Choice>
-        <mc:Fallback>
+        <mc:Fallback xmlns="">
           <p:sp>
             <p:nvSpPr>
               <p:cNvPr id="73" name="TextBox 72">
@@ -7136,6 +7141,316 @@
           </a:prstGeom>
         </p:spPr>
       </p:pic>
+      <p:sp>
+        <p:nvSpPr>
+          <p:cNvPr id="2" name="Block Arc 1">
+            <a:extLst>
+              <a:ext uri="{FF2B5EF4-FFF2-40B4-BE49-F238E27FC236}">
+                <a16:creationId xmlns:a16="http://schemas.microsoft.com/office/drawing/2014/main" id="{75BE6FF0-998E-0ABD-E1EB-37CFD98AAB7A}"/>
+              </a:ext>
+            </a:extLst>
+          </p:cNvPr>
+          <p:cNvSpPr/>
+          <p:nvPr/>
+        </p:nvSpPr>
+        <p:spPr>
+          <a:xfrm rot="19337276">
+            <a:off x="-1170134" y="5696236"/>
+            <a:ext cx="4594286" cy="4594286"/>
+          </a:xfrm>
+          <a:prstGeom prst="blockArc">
+            <a:avLst>
+              <a:gd name="adj1" fmla="val 19992411"/>
+              <a:gd name="adj2" fmla="val 1812621"/>
+              <a:gd name="adj3" fmla="val 39622"/>
+            </a:avLst>
+          </a:prstGeom>
+          <a:noFill/>
+          <a:ln>
+            <a:solidFill>
+              <a:srgbClr val="C00000">
+                <a:alpha val="25098"/>
+              </a:srgbClr>
+            </a:solidFill>
+          </a:ln>
+        </p:spPr>
+        <p:style>
+          <a:lnRef idx="2">
+            <a:schemeClr val="accent1">
+              <a:shade val="15000"/>
+            </a:schemeClr>
+          </a:lnRef>
+          <a:fillRef idx="1">
+            <a:schemeClr val="accent1"/>
+          </a:fillRef>
+          <a:effectRef idx="0">
+            <a:schemeClr val="accent1"/>
+          </a:effectRef>
+          <a:fontRef idx="minor">
+            <a:schemeClr val="lt1"/>
+          </a:fontRef>
+        </p:style>
+        <p:txBody>
+          <a:bodyPr rtlCol="0" anchor="ctr"/>
+          <a:lstStyle/>
+          <a:p>
+            <a:pPr algn="ctr"/>
+            <a:endParaRPr lang="da-DK">
+              <a:solidFill>
+                <a:schemeClr val="tx1"/>
+              </a:solidFill>
+            </a:endParaRPr>
+          </a:p>
+        </p:txBody>
+      </p:sp>
+      <p:sp>
+        <p:nvSpPr>
+          <p:cNvPr id="3" name="Block Arc 2">
+            <a:extLst>
+              <a:ext uri="{FF2B5EF4-FFF2-40B4-BE49-F238E27FC236}">
+                <a16:creationId xmlns:a16="http://schemas.microsoft.com/office/drawing/2014/main" id="{3A351235-B302-FDF3-D2A0-844B6A81F167}"/>
+              </a:ext>
+            </a:extLst>
+          </p:cNvPr>
+          <p:cNvSpPr/>
+          <p:nvPr/>
+        </p:nvSpPr>
+        <p:spPr>
+          <a:xfrm rot="16571270">
+            <a:off x="2570974" y="7327351"/>
+            <a:ext cx="3242766" cy="3242766"/>
+          </a:xfrm>
+          <a:prstGeom prst="blockArc">
+            <a:avLst>
+              <a:gd name="adj1" fmla="val 18599096"/>
+              <a:gd name="adj2" fmla="val 21477037"/>
+              <a:gd name="adj3" fmla="val 39090"/>
+            </a:avLst>
+          </a:prstGeom>
+          <a:noFill/>
+          <a:ln>
+            <a:solidFill>
+              <a:srgbClr val="0070C0">
+                <a:alpha val="25098"/>
+              </a:srgbClr>
+            </a:solidFill>
+          </a:ln>
+        </p:spPr>
+        <p:style>
+          <a:lnRef idx="2">
+            <a:schemeClr val="accent1">
+              <a:shade val="15000"/>
+            </a:schemeClr>
+          </a:lnRef>
+          <a:fillRef idx="1">
+            <a:schemeClr val="accent1"/>
+          </a:fillRef>
+          <a:effectRef idx="0">
+            <a:schemeClr val="accent1"/>
+          </a:effectRef>
+          <a:fontRef idx="minor">
+            <a:schemeClr val="lt1"/>
+          </a:fontRef>
+        </p:style>
+        <p:txBody>
+          <a:bodyPr rtlCol="0" anchor="ctr"/>
+          <a:lstStyle/>
+          <a:p>
+            <a:pPr algn="ctr"/>
+            <a:endParaRPr lang="da-DK">
+              <a:solidFill>
+                <a:schemeClr val="tx1"/>
+              </a:solidFill>
+            </a:endParaRPr>
+          </a:p>
+        </p:txBody>
+      </p:sp>
+      <p:sp>
+        <p:nvSpPr>
+          <p:cNvPr id="5" name="Block Arc 4">
+            <a:extLst>
+              <a:ext uri="{FF2B5EF4-FFF2-40B4-BE49-F238E27FC236}">
+                <a16:creationId xmlns:a16="http://schemas.microsoft.com/office/drawing/2014/main" id="{11579F0E-D54D-0033-14C2-E4A04BCF7375}"/>
+              </a:ext>
+            </a:extLst>
+          </p:cNvPr>
+          <p:cNvSpPr/>
+          <p:nvPr/>
+        </p:nvSpPr>
+        <p:spPr>
+          <a:xfrm rot="12949976">
+            <a:off x="4525008" y="4536349"/>
+            <a:ext cx="3309798" cy="3309798"/>
+          </a:xfrm>
+          <a:prstGeom prst="blockArc">
+            <a:avLst>
+              <a:gd name="adj1" fmla="val 18565463"/>
+              <a:gd name="adj2" fmla="val 20725963"/>
+              <a:gd name="adj3" fmla="val 37726"/>
+            </a:avLst>
+          </a:prstGeom>
+          <a:noFill/>
+          <a:ln>
+            <a:solidFill>
+              <a:srgbClr val="FFC000">
+                <a:alpha val="25098"/>
+              </a:srgbClr>
+            </a:solidFill>
+          </a:ln>
+        </p:spPr>
+        <p:style>
+          <a:lnRef idx="2">
+            <a:schemeClr val="accent1">
+              <a:shade val="15000"/>
+            </a:schemeClr>
+          </a:lnRef>
+          <a:fillRef idx="1">
+            <a:schemeClr val="accent1"/>
+          </a:fillRef>
+          <a:effectRef idx="0">
+            <a:schemeClr val="accent1"/>
+          </a:effectRef>
+          <a:fontRef idx="minor">
+            <a:schemeClr val="lt1"/>
+          </a:fontRef>
+        </p:style>
+        <p:txBody>
+          <a:bodyPr rtlCol="0" anchor="ctr"/>
+          <a:lstStyle/>
+          <a:p>
+            <a:pPr algn="ctr"/>
+            <a:endParaRPr lang="da-DK">
+              <a:solidFill>
+                <a:schemeClr val="tx1"/>
+              </a:solidFill>
+            </a:endParaRPr>
+          </a:p>
+        </p:txBody>
+      </p:sp>
+      <p:sp>
+        <p:nvSpPr>
+          <p:cNvPr id="7" name="Block Arc 6">
+            <a:extLst>
+              <a:ext uri="{FF2B5EF4-FFF2-40B4-BE49-F238E27FC236}">
+                <a16:creationId xmlns:a16="http://schemas.microsoft.com/office/drawing/2014/main" id="{6393D240-6B22-4382-F28B-571C56A6D1A8}"/>
+              </a:ext>
+            </a:extLst>
+          </p:cNvPr>
+          <p:cNvSpPr/>
+          <p:nvPr/>
+        </p:nvSpPr>
+        <p:spPr>
+          <a:xfrm rot="2513493">
+            <a:off x="-1067861" y="1215233"/>
+            <a:ext cx="4831382" cy="4831382"/>
+          </a:xfrm>
+          <a:prstGeom prst="blockArc">
+            <a:avLst>
+              <a:gd name="adj1" fmla="val 19919032"/>
+              <a:gd name="adj2" fmla="val 1369971"/>
+              <a:gd name="adj3" fmla="val 41193"/>
+            </a:avLst>
+          </a:prstGeom>
+          <a:noFill/>
+          <a:ln>
+            <a:solidFill>
+              <a:srgbClr val="767171">
+                <a:alpha val="25098"/>
+              </a:srgbClr>
+            </a:solidFill>
+          </a:ln>
+        </p:spPr>
+        <p:style>
+          <a:lnRef idx="2">
+            <a:schemeClr val="accent1">
+              <a:shade val="15000"/>
+            </a:schemeClr>
+          </a:lnRef>
+          <a:fillRef idx="1">
+            <a:schemeClr val="accent1"/>
+          </a:fillRef>
+          <a:effectRef idx="0">
+            <a:schemeClr val="accent1"/>
+          </a:effectRef>
+          <a:fontRef idx="minor">
+            <a:schemeClr val="lt1"/>
+          </a:fontRef>
+        </p:style>
+        <p:txBody>
+          <a:bodyPr rtlCol="0" anchor="ctr"/>
+          <a:lstStyle/>
+          <a:p>
+            <a:pPr algn="ctr"/>
+            <a:endParaRPr lang="da-DK">
+              <a:solidFill>
+                <a:schemeClr val="tx1"/>
+              </a:solidFill>
+            </a:endParaRPr>
+          </a:p>
+        </p:txBody>
+      </p:sp>
+      <p:sp>
+        <p:nvSpPr>
+          <p:cNvPr id="13" name="Block Arc 12">
+            <a:extLst>
+              <a:ext uri="{FF2B5EF4-FFF2-40B4-BE49-F238E27FC236}">
+                <a16:creationId xmlns:a16="http://schemas.microsoft.com/office/drawing/2014/main" id="{62ECFA3D-7827-DC51-657D-A4A86E76FEF2}"/>
+              </a:ext>
+            </a:extLst>
+          </p:cNvPr>
+          <p:cNvSpPr/>
+          <p:nvPr/>
+        </p:nvSpPr>
+        <p:spPr>
+          <a:xfrm rot="7731203">
+            <a:off x="3670766" y="1139002"/>
+            <a:ext cx="3109336" cy="3109336"/>
+          </a:xfrm>
+          <a:prstGeom prst="blockArc">
+            <a:avLst>
+              <a:gd name="adj1" fmla="val 20289594"/>
+              <a:gd name="adj2" fmla="val 21505868"/>
+              <a:gd name="adj3" fmla="val 33767"/>
+            </a:avLst>
+          </a:prstGeom>
+          <a:noFill/>
+          <a:ln>
+            <a:solidFill>
+              <a:srgbClr val="00B050">
+                <a:alpha val="25098"/>
+              </a:srgbClr>
+            </a:solidFill>
+          </a:ln>
+        </p:spPr>
+        <p:style>
+          <a:lnRef idx="2">
+            <a:schemeClr val="accent1">
+              <a:shade val="15000"/>
+            </a:schemeClr>
+          </a:lnRef>
+          <a:fillRef idx="1">
+            <a:schemeClr val="accent1"/>
+          </a:fillRef>
+          <a:effectRef idx="0">
+            <a:schemeClr val="accent1"/>
+          </a:effectRef>
+          <a:fontRef idx="minor">
+            <a:schemeClr val="lt1"/>
+          </a:fontRef>
+        </p:style>
+        <p:txBody>
+          <a:bodyPr rtlCol="0" anchor="ctr"/>
+          <a:lstStyle/>
+          <a:p>
+            <a:pPr algn="ctr"/>
+            <a:endParaRPr lang="da-DK">
+              <a:solidFill>
+                <a:schemeClr val="tx1"/>
+              </a:solidFill>
+            </a:endParaRPr>
+          </a:p>
+        </p:txBody>
+      </p:sp>
     </p:spTree>
     <p:extLst>
       <p:ext uri="{BB962C8B-B14F-4D97-AF65-F5344CB8AC3E}">
